--- a/curriculum/M01/W08/L01/slides.pptx
+++ b/curriculum/M01/W08/L01/slides.pptx
@@ -18093,11 +18093,40 @@
                 <a:ea typeface="Malgun Gothic"/>
                 <a:cs typeface="Malgun Gothic"/>
               </a:rPr>
-              <a:t> ATP를 써서 ubiquitin의 C-말단을 자신의 cysteine에 thioester로 연결해 활성화한다. 2. </a:t>
-            </a:r>
+              <a:t> ATP를 써서 ubiquitin의 C-말단을 자신의 cysteine에 thioester로 연결해 활성화한다.</a:t>
+            </a:r>
+          </a:p>
+          <a:p>
+            <a:pPr>
+              <a:spcAft>
+                <a:spcPts val="900"/>
+              </a:spcAft>
+            </a:pPr>
             <a:r>
               <a:rPr sz="1400" b="1" i="0">
                 <a:solidFill>
+                  <a:srgbClr val="F2B705"/>
+                </a:solidFill>
+                <a:latin typeface="Malgun Gothic"/>
+                <a:ea typeface="Malgun Gothic"/>
+                <a:cs typeface="Malgun Gothic"/>
+              </a:rPr>
+              <a:t>•  </a:t>
+            </a:r>
+            <a:r>
+              <a:rPr sz="1400" b="0" i="0">
+                <a:solidFill>
+                  <a:srgbClr val="11202B"/>
+                </a:solidFill>
+                <a:latin typeface="Malgun Gothic"/>
+                <a:ea typeface="Malgun Gothic"/>
+                <a:cs typeface="Malgun Gothic"/>
+              </a:rPr>
+              <a:t>2. </a:t>
+            </a:r>
+            <a:r>
+              <a:rPr sz="1400" b="1" i="0">
+                <a:solidFill>
                   <a:srgbClr val="11202B"/>
                 </a:solidFill>
                 <a:latin typeface="Malgun Gothic"/>
@@ -18115,7 +18144,36 @@
                 <a:ea typeface="Malgun Gothic"/>
                 <a:cs typeface="Malgun Gothic"/>
               </a:rPr>
-              <a:t> 활성화된 ubiquitin을 E1에서 받아 옮겨 받는다. 3. </a:t>
+              <a:t> 활성화된 ubiquitin을 E1에서 받아 옮겨 받는다.</a:t>
+            </a:r>
+          </a:p>
+          <a:p>
+            <a:pPr>
+              <a:spcAft>
+                <a:spcPts val="900"/>
+              </a:spcAft>
+            </a:pPr>
+            <a:r>
+              <a:rPr sz="1400" b="1" i="0">
+                <a:solidFill>
+                  <a:srgbClr val="F2B705"/>
+                </a:solidFill>
+                <a:latin typeface="Malgun Gothic"/>
+                <a:ea typeface="Malgun Gothic"/>
+                <a:cs typeface="Malgun Gothic"/>
+              </a:rPr>
+              <a:t>•  </a:t>
+            </a:r>
+            <a:r>
+              <a:rPr sz="1400" b="0" i="0">
+                <a:solidFill>
+                  <a:srgbClr val="11202B"/>
+                </a:solidFill>
+                <a:latin typeface="Malgun Gothic"/>
+                <a:ea typeface="Malgun Gothic"/>
+                <a:cs typeface="Malgun Gothic"/>
+              </a:rPr>
+              <a:t>3. </a:t>
             </a:r>
             <a:r>
               <a:rPr sz="1400" b="1" i="0">

--- a/curriculum/M01/W08/L01/slides.pptx
+++ b/curriculum/M01/W08/L01/slides.pptx
@@ -14877,7 +14877,7 @@
                 <a:ea typeface="Malgun Gothic"/>
                 <a:cs typeface="Malgun Gothic"/>
               </a:rPr>
-              <a:t>M01-W05-L03 유전정보의 흐름 — central dogma, mRNA 가공</a:t>
+              <a:t>M01-W05-L03 유전정보의 흐름: 복제·전사·번역 — central dogma, mRNA 가공</a:t>
             </a:r>
           </a:p>
         </p:txBody>
